--- a/output/05-security-privacy/05-06-safe-use-of-ai-at-work.pptx
+++ b/output/05-security-privacy/05-06-safe-use-of-ai-at-work.pptx
@@ -24381,7 +24381,7 @@
                 </a:solidFill>
                 <a:latin typeface="Segoe UI"/>
               </a:rPr>
-              <a:t>The company has an agreement and you use your work account</a:t>
+              <a:t>The company has explicitly approved this tool, this account and this use</a:t>
             </a:r>
           </a:p>
         </p:txBody>
@@ -25142,7 +25142,7 @@
                 </a:solidFill>
                 <a:latin typeface="Segoe UI"/>
               </a:rPr>
-              <a:t>An agreement and an account, not the brand.</a:t>
+              <a:t>The tool, the account and the use case — not just the brand.</a:t>
             </a:r>
           </a:p>
         </p:txBody>
@@ -25870,7 +25870,7 @@
                 </a:solidFill>
                 <a:latin typeface="Segoe UI Semibold"/>
               </a:rPr>
-              <a:t>YOU CHOSE  B.  The company has an agreement and you use your work account</a:t>
+              <a:t>YOU CHOSE  B.  The company has explicitly approved this tool, this account and this u</a:t>
             </a:r>
           </a:p>
         </p:txBody>
@@ -25915,7 +25915,7 @@
                 </a:solidFill>
                 <a:latin typeface="Segoe UI"/>
               </a:rPr>
-              <a:t>Those two together give terms somebody has read, managed access, and a person who can answer questions about it afterwards. Without them, none of that exists.</a:t>
+              <a:t>All three together give terms somebody has read, managed access, and a person who can answer questions afterwards. A work account on the company's general subscription does not by itself approve every tool or every use of it.</a:t>
             </a:r>
           </a:p>
         </p:txBody>
@@ -26049,7 +26049,7 @@
                 </a:solidFill>
                 <a:latin typeface="Segoe UI"/>
               </a:rPr>
-              <a:t>An agreement and an account, not the brand.</a:t>
+              <a:t>The tool, the account and the use case — not just the brand.</a:t>
             </a:r>
           </a:p>
         </p:txBody>
@@ -26956,7 +26956,7 @@
                 </a:solidFill>
                 <a:latin typeface="Segoe UI"/>
               </a:rPr>
-              <a:t>An agreement and an account, not the brand.</a:t>
+              <a:t>The tool, the account and the use case — not just the brand.</a:t>
             </a:r>
           </a:p>
         </p:txBody>
@@ -27863,7 +27863,7 @@
                 </a:solidFill>
                 <a:latin typeface="Segoe UI"/>
               </a:rPr>
-              <a:t>An agreement and an account, not the brand.</a:t>
+              <a:t>The tool, the account and the use case — not just the brand.</a:t>
             </a:r>
           </a:p>
         </p:txBody>
@@ -42618,7 +42618,7 @@
                 </a:solidFill>
                 <a:latin typeface="Segoe UI"/>
               </a:rPr>
-              <a:t>The account decides</a:t>
+              <a:t>More than an account</a:t>
             </a:r>
           </a:p>
         </p:txBody>
@@ -53358,7 +53358,7 @@
                 </a:solidFill>
                 <a:latin typeface="Segoe UI Semibold"/>
               </a:rPr>
-              <a:t>The account decides</a:t>
+              <a:t>Approval is more than an account</a:t>
             </a:r>
           </a:p>
         </p:txBody>
@@ -53403,7 +53403,7 @@
                 </a:solidFill>
                 <a:latin typeface="Segoe UI"/>
               </a:rPr>
-              <a:t>The same model is safe on a work account and unassessed on a personal one.</a:t>
+              <a:t>The tool, the configuration and the use case all need to be approved too, not just the account.</a:t>
             </a:r>
           </a:p>
         </p:txBody>
@@ -56884,7 +56884,7 @@
                 </a:solidFill>
                 <a:latin typeface="Segoe UI Semibold"/>
               </a:rPr>
-              <a:t>The account decides everything</a:t>
+              <a:t>Approval is more than being logged in</a:t>
             </a:r>
           </a:p>
         </p:txBody>
@@ -57349,7 +57349,7 @@
         <p:spPr>
           <a:xfrm>
             <a:off x="502920" y="1719072"/>
-            <a:ext cx="8343671" cy="822959"/>
+            <a:ext cx="8343671" cy="1097280"/>
           </a:xfrm>
           <a:prstGeom prst="rect">
             <a:avLst/>
@@ -57380,7 +57380,7 @@
                 </a:solidFill>
                 <a:latin typeface="Segoe UI"/>
               </a:rPr>
-              <a:t>The same model can be safe or unsafe depending entirely on which account you signed in with.</a:t>
+              <a:t>The same model can be safe or unsafe depending on the account you signed in with — but the account alone does not make a use approved. The tool, the configuration and what you are using it for all have to be approved too.</a:t>
             </a:r>
           </a:p>
         </p:txBody>
@@ -57393,12 +57393,12 @@
         </p:nvSpPr>
         <p:spPr>
           <a:xfrm>
-            <a:off x="502920" y="2706624"/>
-            <a:ext cx="5437479" cy="2834640"/>
+            <a:off x="502920" y="2980944"/>
+            <a:ext cx="5437479" cy="2560320"/>
           </a:xfrm>
           <a:prstGeom prst="roundRect">
             <a:avLst>
-              <a:gd name="adj" fmla="val 3225"/>
+              <a:gd name="adj" fmla="val 3571"/>
             </a:avLst>
           </a:prstGeom>
           <a:solidFill>
@@ -57437,8 +57437,8 @@
         </p:nvSpPr>
         <p:spPr>
           <a:xfrm>
-            <a:off x="502920" y="2706624"/>
-            <a:ext cx="68580" cy="2834640"/>
+            <a:off x="502920" y="2980944"/>
+            <a:ext cx="68580" cy="2560320"/>
           </a:xfrm>
           <a:prstGeom prst="rect">
             <a:avLst/>
@@ -57479,7 +57479,7 @@
         </p:nvSpPr>
         <p:spPr>
           <a:xfrm>
-            <a:off x="777240" y="2944368"/>
+            <a:off x="777240" y="3218687"/>
             <a:ext cx="1615059" cy="274320"/>
           </a:xfrm>
           <a:prstGeom prst="roundRect">
@@ -57523,7 +57523,7 @@
         </p:nvSpPr>
         <p:spPr>
           <a:xfrm>
-            <a:off x="932688" y="2971799"/>
+            <a:off x="932688" y="3246119"/>
             <a:ext cx="1304162" cy="219456"/>
           </a:xfrm>
           <a:prstGeom prst="rect">
@@ -57568,7 +57568,7 @@
         </p:nvSpPr>
         <p:spPr>
           <a:xfrm>
-            <a:off x="777240" y="3364991"/>
+            <a:off x="777240" y="3639311"/>
             <a:ext cx="4888839" cy="566928"/>
           </a:xfrm>
           <a:prstGeom prst="rect">
@@ -57613,7 +57613,7 @@
         </p:nvCxnSpPr>
         <p:spPr>
           <a:xfrm>
-            <a:off x="819302" y="4079138"/>
+            <a:off x="819302" y="4353458"/>
             <a:ext cx="117043" cy="117043"/>
           </a:xfrm>
           <a:prstGeom prst="line">
@@ -57649,7 +57649,7 @@
         </p:nvCxnSpPr>
         <p:spPr>
           <a:xfrm flipH="1">
-            <a:off x="819302" y="4079138"/>
+            <a:off x="819302" y="4353458"/>
             <a:ext cx="117043" cy="117043"/>
           </a:xfrm>
           <a:prstGeom prst="line">
@@ -57685,8 +57685,8 @@
         </p:nvSpPr>
         <p:spPr>
           <a:xfrm>
-            <a:off x="1078992" y="4005072"/>
-            <a:ext cx="4587087" cy="274320"/>
+            <a:off x="1078992" y="4279392"/>
+            <a:ext cx="4587087" cy="205740"/>
           </a:xfrm>
           <a:prstGeom prst="rect">
             <a:avLst/>
@@ -57701,7 +57701,7 @@
           <a:p>
             <a:pPr algn="l">
               <a:lnSpc>
-                <a:spcPts val="1690"/>
+                <a:spcPts val="1560"/>
               </a:lnSpc>
               <a:spcBef>
                 <a:spcPts val="0"/>
@@ -57711,7 +57711,7 @@
               </a:spcAft>
             </a:pPr>
             <a:r>
-              <a:rPr sz="1300" b="0">
+              <a:rPr sz="1200" b="0">
                 <a:solidFill>
                   <a:srgbClr val="2A3547"/>
                 </a:solidFill>
@@ -57730,7 +57730,7 @@
         </p:nvCxnSpPr>
         <p:spPr>
           <a:xfrm>
-            <a:off x="819302" y="4408322"/>
+            <a:off x="819302" y="4614062"/>
             <a:ext cx="117043" cy="117043"/>
           </a:xfrm>
           <a:prstGeom prst="line">
@@ -57766,7 +57766,7 @@
         </p:nvCxnSpPr>
         <p:spPr>
           <a:xfrm flipH="1">
-            <a:off x="819302" y="4408322"/>
+            <a:off x="819302" y="4614062"/>
             <a:ext cx="117043" cy="117043"/>
           </a:xfrm>
           <a:prstGeom prst="line">
@@ -57802,8 +57802,8 @@
         </p:nvSpPr>
         <p:spPr>
           <a:xfrm>
-            <a:off x="1078992" y="4334256"/>
-            <a:ext cx="4587087" cy="274320"/>
+            <a:off x="1078992" y="4539996"/>
+            <a:ext cx="4587087" cy="205740"/>
           </a:xfrm>
           <a:prstGeom prst="rect">
             <a:avLst/>
@@ -57818,7 +57818,7 @@
           <a:p>
             <a:pPr algn="l">
               <a:lnSpc>
-                <a:spcPts val="1690"/>
+                <a:spcPts val="1560"/>
               </a:lnSpc>
               <a:spcBef>
                 <a:spcPts val="0"/>
@@ -57828,7 +57828,7 @@
               </a:spcAft>
             </a:pPr>
             <a:r>
-              <a:rPr sz="1300" b="0">
+              <a:rPr sz="1200" b="0">
                 <a:solidFill>
                   <a:srgbClr val="2A3547"/>
                 </a:solidFill>
@@ -57847,7 +57847,7 @@
         </p:nvCxnSpPr>
         <p:spPr>
           <a:xfrm>
-            <a:off x="819302" y="4737506"/>
+            <a:off x="819302" y="4874666"/>
             <a:ext cx="117043" cy="117043"/>
           </a:xfrm>
           <a:prstGeom prst="line">
@@ -57883,7 +57883,7 @@
         </p:nvCxnSpPr>
         <p:spPr>
           <a:xfrm flipH="1">
-            <a:off x="819302" y="4737506"/>
+            <a:off x="819302" y="4874666"/>
             <a:ext cx="117043" cy="117043"/>
           </a:xfrm>
           <a:prstGeom prst="line">
@@ -57919,8 +57919,8 @@
         </p:nvSpPr>
         <p:spPr>
           <a:xfrm>
-            <a:off x="1078992" y="4663440"/>
-            <a:ext cx="4587087" cy="274320"/>
+            <a:off x="1078992" y="4800600"/>
+            <a:ext cx="4587087" cy="205740"/>
           </a:xfrm>
           <a:prstGeom prst="rect">
             <a:avLst/>
@@ -57935,7 +57935,7 @@
           <a:p>
             <a:pPr algn="l">
               <a:lnSpc>
-                <a:spcPts val="1690"/>
+                <a:spcPts val="1560"/>
               </a:lnSpc>
               <a:spcBef>
                 <a:spcPts val="0"/>
@@ -57945,7 +57945,7 @@
               </a:spcAft>
             </a:pPr>
             <a:r>
-              <a:rPr sz="1300" b="0">
+              <a:rPr sz="1200" b="0">
                 <a:solidFill>
                   <a:srgbClr val="2A3547"/>
                 </a:solidFill>
@@ -57964,7 +57964,7 @@
         </p:nvCxnSpPr>
         <p:spPr>
           <a:xfrm>
-            <a:off x="819302" y="5066690"/>
+            <a:off x="819302" y="5135270"/>
             <a:ext cx="117043" cy="117043"/>
           </a:xfrm>
           <a:prstGeom prst="line">
@@ -58000,7 +58000,7 @@
         </p:nvCxnSpPr>
         <p:spPr>
           <a:xfrm flipH="1">
-            <a:off x="819302" y="5066690"/>
+            <a:off x="819302" y="5135270"/>
             <a:ext cx="117043" cy="117043"/>
           </a:xfrm>
           <a:prstGeom prst="line">
@@ -58036,8 +58036,8 @@
         </p:nvSpPr>
         <p:spPr>
           <a:xfrm>
-            <a:off x="1078992" y="4992624"/>
-            <a:ext cx="4587087" cy="274320"/>
+            <a:off x="1078992" y="5061204"/>
+            <a:ext cx="4587087" cy="205740"/>
           </a:xfrm>
           <a:prstGeom prst="rect">
             <a:avLst/>
@@ -58052,7 +58052,7 @@
           <a:p>
             <a:pPr algn="l">
               <a:lnSpc>
-                <a:spcPts val="1690"/>
+                <a:spcPts val="1560"/>
               </a:lnSpc>
               <a:spcBef>
                 <a:spcPts val="0"/>
@@ -58062,7 +58062,7 @@
               </a:spcAft>
             </a:pPr>
             <a:r>
-              <a:rPr sz="1300" b="0">
+              <a:rPr sz="1200" b="0">
                 <a:solidFill>
                   <a:srgbClr val="2A3547"/>
                 </a:solidFill>
@@ -58081,12 +58081,12 @@
         </p:nvSpPr>
         <p:spPr>
           <a:xfrm>
-            <a:off x="6251295" y="2706624"/>
-            <a:ext cx="5437479" cy="2834640"/>
+            <a:off x="6251295" y="2980944"/>
+            <a:ext cx="5437479" cy="2560320"/>
           </a:xfrm>
           <a:prstGeom prst="roundRect">
             <a:avLst>
-              <a:gd name="adj" fmla="val 3225"/>
+              <a:gd name="adj" fmla="val 3571"/>
             </a:avLst>
           </a:prstGeom>
           <a:solidFill>
@@ -58125,8 +58125,8 @@
         </p:nvSpPr>
         <p:spPr>
           <a:xfrm>
-            <a:off x="6251295" y="2706624"/>
-            <a:ext cx="68580" cy="2834640"/>
+            <a:off x="6251295" y="2980944"/>
+            <a:ext cx="68580" cy="2560320"/>
           </a:xfrm>
           <a:prstGeom prst="rect">
             <a:avLst/>
@@ -58167,7 +58167,7 @@
         </p:nvSpPr>
         <p:spPr>
           <a:xfrm>
-            <a:off x="6525615" y="2944368"/>
+            <a:off x="6525615" y="3218687"/>
             <a:ext cx="1366774" cy="274320"/>
           </a:xfrm>
           <a:prstGeom prst="roundRect">
@@ -58211,7 +58211,7 @@
         </p:nvSpPr>
         <p:spPr>
           <a:xfrm>
-            <a:off x="6681063" y="2971799"/>
+            <a:off x="6681063" y="3246119"/>
             <a:ext cx="1055878" cy="219456"/>
           </a:xfrm>
           <a:prstGeom prst="rect">
@@ -58256,7 +58256,7 @@
         </p:nvSpPr>
         <p:spPr>
           <a:xfrm>
-            <a:off x="6525615" y="3364991"/>
+            <a:off x="6525615" y="3639311"/>
             <a:ext cx="4888839" cy="566928"/>
           </a:xfrm>
           <a:prstGeom prst="rect">
@@ -58301,7 +58301,7 @@
         </p:nvCxnSpPr>
         <p:spPr>
           <a:xfrm>
-            <a:off x="6560362" y="4141317"/>
+            <a:off x="6560362" y="4415637"/>
             <a:ext cx="47549" cy="47549"/>
           </a:xfrm>
           <a:prstGeom prst="line">
@@ -58337,7 +58337,7 @@
         </p:nvCxnSpPr>
         <p:spPr>
           <a:xfrm flipV="1">
-            <a:off x="6607911" y="4086453"/>
+            <a:off x="6607911" y="4360773"/>
             <a:ext cx="87783" cy="102413"/>
           </a:xfrm>
           <a:prstGeom prst="line">
@@ -58373,8 +58373,8 @@
         </p:nvSpPr>
         <p:spPr>
           <a:xfrm>
-            <a:off x="6827367" y="4005072"/>
-            <a:ext cx="4587087" cy="274320"/>
+            <a:off x="6827367" y="4279392"/>
+            <a:ext cx="4587087" cy="205740"/>
           </a:xfrm>
           <a:prstGeom prst="rect">
             <a:avLst/>
@@ -58389,7 +58389,7 @@
           <a:p>
             <a:pPr algn="l">
               <a:lnSpc>
-                <a:spcPts val="1690"/>
+                <a:spcPts val="1560"/>
               </a:lnSpc>
               <a:spcBef>
                 <a:spcPts val="0"/>
@@ -58399,7 +58399,7 @@
               </a:spcAft>
             </a:pPr>
             <a:r>
-              <a:rPr sz="1300" b="0">
+              <a:rPr sz="1200" b="0">
                 <a:solidFill>
                   <a:srgbClr val="2A3547"/>
                 </a:solidFill>
@@ -58418,7 +58418,7 @@
         </p:nvCxnSpPr>
         <p:spPr>
           <a:xfrm>
-            <a:off x="6560362" y="4470501"/>
+            <a:off x="6560362" y="4676241"/>
             <a:ext cx="47549" cy="47549"/>
           </a:xfrm>
           <a:prstGeom prst="line">
@@ -58454,7 +58454,7 @@
         </p:nvCxnSpPr>
         <p:spPr>
           <a:xfrm flipV="1">
-            <a:off x="6607911" y="4415637"/>
+            <a:off x="6607911" y="4621377"/>
             <a:ext cx="87783" cy="102413"/>
           </a:xfrm>
           <a:prstGeom prst="line">
@@ -58490,8 +58490,8 @@
         </p:nvSpPr>
         <p:spPr>
           <a:xfrm>
-            <a:off x="6827367" y="4334256"/>
-            <a:ext cx="4587087" cy="274320"/>
+            <a:off x="6827367" y="4539996"/>
+            <a:ext cx="4587087" cy="205740"/>
           </a:xfrm>
           <a:prstGeom prst="rect">
             <a:avLst/>
@@ -58506,7 +58506,7 @@
           <a:p>
             <a:pPr algn="l">
               <a:lnSpc>
-                <a:spcPts val="1690"/>
+                <a:spcPts val="1560"/>
               </a:lnSpc>
               <a:spcBef>
                 <a:spcPts val="0"/>
@@ -58516,7 +58516,7 @@
               </a:spcAft>
             </a:pPr>
             <a:r>
-              <a:rPr sz="1300" b="0">
+              <a:rPr sz="1200" b="0">
                 <a:solidFill>
                   <a:srgbClr val="2A3547"/>
                 </a:solidFill>
@@ -58535,7 +58535,7 @@
         </p:nvCxnSpPr>
         <p:spPr>
           <a:xfrm>
-            <a:off x="6560362" y="4799685"/>
+            <a:off x="6560362" y="4936845"/>
             <a:ext cx="47549" cy="47549"/>
           </a:xfrm>
           <a:prstGeom prst="line">
@@ -58571,7 +58571,7 @@
         </p:nvCxnSpPr>
         <p:spPr>
           <a:xfrm flipV="1">
-            <a:off x="6607911" y="4744821"/>
+            <a:off x="6607911" y="4881981"/>
             <a:ext cx="87783" cy="102413"/>
           </a:xfrm>
           <a:prstGeom prst="line">
@@ -58607,8 +58607,8 @@
         </p:nvSpPr>
         <p:spPr>
           <a:xfrm>
-            <a:off x="6827367" y="4663440"/>
-            <a:ext cx="4587087" cy="274320"/>
+            <a:off x="6827367" y="4800600"/>
+            <a:ext cx="4587087" cy="205740"/>
           </a:xfrm>
           <a:prstGeom prst="rect">
             <a:avLst/>
@@ -58623,7 +58623,7 @@
           <a:p>
             <a:pPr algn="l">
               <a:lnSpc>
-                <a:spcPts val="1690"/>
+                <a:spcPts val="1560"/>
               </a:lnSpc>
               <a:spcBef>
                 <a:spcPts val="0"/>
@@ -58633,7 +58633,7 @@
               </a:spcAft>
             </a:pPr>
             <a:r>
-              <a:rPr sz="1300" b="0">
+              <a:rPr sz="1200" b="0">
                 <a:solidFill>
                   <a:srgbClr val="2A3547"/>
                 </a:solidFill>
@@ -58652,7 +58652,7 @@
         </p:nvCxnSpPr>
         <p:spPr>
           <a:xfrm>
-            <a:off x="6560362" y="5128869"/>
+            <a:off x="6560362" y="5197449"/>
             <a:ext cx="47549" cy="47549"/>
           </a:xfrm>
           <a:prstGeom prst="line">
@@ -58688,7 +58688,7 @@
         </p:nvCxnSpPr>
         <p:spPr>
           <a:xfrm flipV="1">
-            <a:off x="6607911" y="5074005"/>
+            <a:off x="6607911" y="5142585"/>
             <a:ext cx="87783" cy="102413"/>
           </a:xfrm>
           <a:prstGeom prst="line">
@@ -58724,8 +58724,8 @@
         </p:nvSpPr>
         <p:spPr>
           <a:xfrm>
-            <a:off x="6827367" y="4992624"/>
-            <a:ext cx="4587087" cy="274320"/>
+            <a:off x="6827367" y="5061204"/>
+            <a:ext cx="4587087" cy="205740"/>
           </a:xfrm>
           <a:prstGeom prst="rect">
             <a:avLst/>
@@ -58740,7 +58740,7 @@
           <a:p>
             <a:pPr algn="l">
               <a:lnSpc>
-                <a:spcPts val="1690"/>
+                <a:spcPts val="1560"/>
               </a:lnSpc>
               <a:spcBef>
                 <a:spcPts val="0"/>
@@ -58750,7 +58750,7 @@
               </a:spcAft>
             </a:pPr>
             <a:r>
-              <a:rPr sz="1300" b="0">
+              <a:rPr sz="1200" b="0">
                 <a:solidFill>
                   <a:srgbClr val="2A3547"/>
                 </a:solidFill>
@@ -59669,7 +59669,7 @@
                 </a:solidFill>
                 <a:latin typeface="Segoe UI"/>
               </a:rPr>
-              <a:t>An AI service the company holds an agreement with, used through your work account.</a:t>
+              <a:t>The tool, account and use the company has actually approved — not just any work login.</a:t>
             </a:r>
           </a:p>
         </p:txBody>
